--- a/examples/ppt/video.pptx
+++ b/examples/ppt/video.pptx
@@ -5,9 +5,10 @@
     <p:sldMasterId xmlns:r="http://schemas.openxmlformats.org/officeDocument/2006/relationships" id="2147483648" r:id="rId1"/>
   </p:sldMasterIdLst>
   <p:sldIdLst>
-    <p:sldId id="256" r:id="Rdef7852f34ad4984"/>
-    <p:sldId id="257" r:id="R67be31a3b8654069"/>
-    <p:sldId id="258" r:id="R2f2c9b96dfb44852"/>
+    <p:sldId id="256" r:id="Rfdc5e14e26374893"/>
+    <p:sldId id="257" r:id="R10974a8591884ca0"/>
+    <p:sldId id="258" r:id="R07bd9ce9622b4247"/>
+    <p:sldId id="259" r:id="R155c3afb867b46ec"/>
   </p:sldIdLst>
   <p:sldSz cx="12192000" cy="6858000"/>
   <p:notesSz cx="6858000" cy="9144000"/>
@@ -59,7 +60,7 @@
           <a:bodyPr xmlns:a="http://schemas.openxmlformats.org/drawingml/2006/main"/>
           <a:lstStyle xmlns:a="http://schemas.openxmlformats.org/drawingml/2006/main"/>
           <a:p xmlns:a="http://schemas.openxmlformats.org/drawingml/2006/main">
-            <a:endParaRPr lang="zh-CN"/>
+            <a:endParaRPr lang="en-US"/>
           </a:p>
         </p:txBody>
       </p:sp>
@@ -70,7 +71,7 @@
             <a:spLocks xmlns:a="http://schemas.openxmlformats.org/drawingml/2006/main" noGrp="1"/>
           </p:cNvSpPr>
           <p:nvPr>
-            <p:ph type="subTitle"/>
+            <p:ph type="subTitle" idx="1"/>
           </p:nvPr>
         </p:nvSpPr>
         <p:spPr>
@@ -83,7 +84,7 @@
           <a:bodyPr xmlns:a="http://schemas.openxmlformats.org/drawingml/2006/main"/>
           <a:lstStyle xmlns:a="http://schemas.openxmlformats.org/drawingml/2006/main"/>
           <a:p xmlns:a="http://schemas.openxmlformats.org/drawingml/2006/main">
-            <a:endParaRPr lang="zh-CN"/>
+            <a:endParaRPr lang="en-US"/>
           </a:p>
         </p:txBody>
       </p:sp>
@@ -122,7 +123,7 @@
           <a:bodyPr xmlns:a="http://schemas.openxmlformats.org/drawingml/2006/main"/>
           <a:lstStyle xmlns:a="http://schemas.openxmlformats.org/drawingml/2006/main"/>
           <a:p xmlns:a="http://schemas.openxmlformats.org/drawingml/2006/main">
-            <a:endParaRPr lang="zh-CN"/>
+            <a:endParaRPr lang="en-US"/>
           </a:p>
         </p:txBody>
       </p:sp>
@@ -133,7 +134,7 @@
             <a:spLocks xmlns:a="http://schemas.openxmlformats.org/drawingml/2006/main" noGrp="1"/>
           </p:cNvSpPr>
           <p:nvPr>
-            <p:ph type="body"/>
+            <p:ph type="body" idx="1"/>
           </p:nvPr>
         </p:nvSpPr>
         <p:spPr>
@@ -146,7 +147,7 @@
           <a:bodyPr xmlns:a="http://schemas.openxmlformats.org/drawingml/2006/main"/>
           <a:lstStyle xmlns:a="http://schemas.openxmlformats.org/drawingml/2006/main"/>
           <a:p xmlns:a="http://schemas.openxmlformats.org/drawingml/2006/main">
-            <a:endParaRPr lang="zh-CN"/>
+            <a:endParaRPr lang="en-US"/>
           </a:p>
         </p:txBody>
       </p:sp>
@@ -185,7 +186,7 @@
           <a:bodyPr xmlns:a="http://schemas.openxmlformats.org/drawingml/2006/main"/>
           <a:lstStyle xmlns:a="http://schemas.openxmlformats.org/drawingml/2006/main"/>
           <a:p xmlns:a="http://schemas.openxmlformats.org/drawingml/2006/main">
-            <a:endParaRPr lang="zh-CN"/>
+            <a:endParaRPr lang="en-US"/>
           </a:p>
         </p:txBody>
       </p:sp>
@@ -196,7 +197,7 @@
             <a:spLocks xmlns:a="http://schemas.openxmlformats.org/drawingml/2006/main" noGrp="1"/>
           </p:cNvSpPr>
           <p:nvPr>
-            <p:ph type="body"/>
+            <p:ph type="body" idx="1"/>
           </p:nvPr>
         </p:nvSpPr>
         <p:spPr>
@@ -209,7 +210,7 @@
           <a:bodyPr xmlns:a="http://schemas.openxmlformats.org/drawingml/2006/main"/>
           <a:lstStyle xmlns:a="http://schemas.openxmlformats.org/drawingml/2006/main"/>
           <a:p xmlns:a="http://schemas.openxmlformats.org/drawingml/2006/main">
-            <a:endParaRPr lang="zh-CN"/>
+            <a:endParaRPr lang="en-US"/>
           </a:p>
         </p:txBody>
       </p:sp>
@@ -220,7 +221,7 @@
             <a:spLocks xmlns:a="http://schemas.openxmlformats.org/drawingml/2006/main" noGrp="1"/>
           </p:cNvSpPr>
           <p:nvPr>
-            <p:ph type="body"/>
+            <p:ph type="body" idx="2"/>
           </p:nvPr>
         </p:nvSpPr>
         <p:spPr>
@@ -233,7 +234,46 @@
           <a:bodyPr xmlns:a="http://schemas.openxmlformats.org/drawingml/2006/main"/>
           <a:lstStyle xmlns:a="http://schemas.openxmlformats.org/drawingml/2006/main"/>
           <a:p xmlns:a="http://schemas.openxmlformats.org/drawingml/2006/main">
-            <a:endParaRPr lang="zh-CN"/>
+            <a:endParaRPr lang="en-US"/>
+          </a:p>
+        </p:txBody>
+      </p:sp>
+    </p:spTree>
+  </p:cSld>
+</p:sldLayout>
+</file>
+
+<file path=ppt/slideLayouts/slideLayout5.xml><?xml version="1.0" encoding="utf-8"?>
+<p:sldLayout xmlns:a="http://schemas.openxmlformats.org/drawingml/2006/main" xmlns:p="http://schemas.openxmlformats.org/presentationml/2006/main" type="titleOnly">
+  <p:cSld name="Title Only">
+    <p:spTree>
+      <p:nvGrpSpPr>
+        <p:cNvPr id="1" name=""/>
+        <p:cNvGrpSpPr/>
+        <p:nvPr/>
+      </p:nvGrpSpPr>
+      <p:grpSpPr/>
+      <p:sp>
+        <p:nvSpPr>
+          <p:cNvPr id="2" name="Title"/>
+          <p:cNvSpPr>
+            <a:spLocks xmlns:a="http://schemas.openxmlformats.org/drawingml/2006/main" noGrp="1"/>
+          </p:cNvSpPr>
+          <p:nvPr>
+            <p:ph type="title"/>
+          </p:nvPr>
+        </p:nvSpPr>
+        <p:spPr>
+          <a:xfrm xmlns:a="http://schemas.openxmlformats.org/drawingml/2006/main">
+            <a:off x="838200" y="365125"/>
+            <a:ext cx="10515600" cy="1325563"/>
+          </a:xfrm>
+        </p:spPr>
+        <p:txBody>
+          <a:bodyPr xmlns:a="http://schemas.openxmlformats.org/drawingml/2006/main"/>
+          <a:lstStyle xmlns:a="http://schemas.openxmlformats.org/drawingml/2006/main"/>
+          <a:p xmlns:a="http://schemas.openxmlformats.org/drawingml/2006/main">
+            <a:endParaRPr lang="en-US"/>
           </a:p>
         </p:txBody>
       </p:sp>
@@ -260,6 +300,7 @@
     <p:sldLayoutId xmlns:r="http://schemas.openxmlformats.org/officeDocument/2006/relationships" id="2147483650" r:id="rId2"/>
     <p:sldLayoutId xmlns:r="http://schemas.openxmlformats.org/officeDocument/2006/relationships" id="2147483651" r:id="rId3"/>
     <p:sldLayoutId xmlns:r="http://schemas.openxmlformats.org/officeDocument/2006/relationships" id="2147483652" r:id="rId4"/>
+    <p:sldLayoutId xmlns:r="http://schemas.openxmlformats.org/officeDocument/2006/relationships" id="2147483653" r:id="rId5"/>
   </p:sldLayoutIdLst>
 </p:sldMaster>
 </file>
@@ -277,7 +318,7 @@
               <a:defRPr sz="1400" b="1"/>
             </a:pPr>
             <a:r>
-              <a:rPr lang="zh-CN" sz="1400" b="1"/>
+              <a:rPr lang="en-US" sz="1400" b="1"/>
               <a:t>Frame Colors</a:t>
             </a:r>
           </a:p>
@@ -288,19 +329,14 @@
     <c:plotArea>
       <c:layout/>
       <c:barChart>
-        <c:barDir val="col"/>
+        <c:barDir val="bar"/>
         <c:grouping val="clustered"/>
         <c:varyColors val="0"/>
         <c:ser>
           <c:idx val="0"/>
           <c:order val="0"/>
           <c:tx>
-            <c:strLit>
-              <c:ptCount val="1"/>
-              <c:pt idx="0">
-                <c:v>Start</c:v>
-              </c:pt>
-            </c:strLit>
+            <c:v>Start</c:v>
           </c:tx>
           <c:spPr>
             <a:solidFill xmlns:a="http://schemas.openxmlformats.org/drawingml/2006/main">
@@ -341,12 +377,7 @@
           <c:idx val="1"/>
           <c:order val="1"/>
           <c:tx>
-            <c:strLit>
-              <c:ptCount val="1"/>
-              <c:pt idx="0">
-                <c:v>End</c:v>
-              </c:pt>
-            </c:strLit>
+            <c:v>End</c:v>
           </c:tx>
           <c:spPr>
             <a:solidFill xmlns:a="http://schemas.openxmlformats.org/drawingml/2006/main">
@@ -459,12 +490,44 @@
       <p:grpSpPr/>
       <p:sp>
         <p:nvSpPr>
+          <p:cNvPr id="2" name="Title"/>
+          <p:cNvSpPr>
+            <a:spLocks xmlns:a="http://schemas.openxmlformats.org/drawingml/2006/main" noGrp="1"/>
+          </p:cNvSpPr>
+          <p:nvPr>
+            <p:ph type="ctrTitle"/>
+          </p:nvPr>
+        </p:nvSpPr>
+        <p:spPr>
+          <a:xfrm xmlns:a="http://schemas.openxmlformats.org/drawingml/2006/main">
+            <a:off x="685800" y="2130425"/>
+            <a:ext cx="7772400" cy="1470025"/>
+          </a:xfrm>
+        </p:spPr>
+        <p:txBody>
+          <a:bodyPr xmlns:a="http://schemas.openxmlformats.org/drawingml/2006/main"/>
+          <a:lstStyle xmlns:a="http://schemas.openxmlformats.org/drawingml/2006/main"/>
+          <a:p xmlns:a="http://schemas.openxmlformats.org/drawingml/2006/main">
+            <a:r>
+              <a:rPr lang="en-US" sz="4400">
+                <a:solidFill>
+                  <a:srgbClr val="FFFFFF"/>
+                </a:solidFill>
+              </a:rPr>
+              <a:t>Video Demo</a:t>
+            </a:r>
+            <a:endParaRPr lang="en-US"/>
+          </a:p>
+        </p:txBody>
+      </p:sp>
+      <p:sp>
+        <p:nvSpPr>
           <p:cNvPr id="3" name="Subtitle"/>
           <p:cNvSpPr>
             <a:spLocks xmlns:a="http://schemas.openxmlformats.org/drawingml/2006/main" noGrp="1"/>
           </p:cNvSpPr>
           <p:nvPr>
-            <p:ph type="subTitle"/>
+            <p:ph type="subTitle" idx="1"/>
           </p:nvPr>
         </p:nvSpPr>
         <p:spPr>
@@ -478,8 +541,14 @@
           <a:lstStyle xmlns:a="http://schemas.openxmlformats.org/drawingml/2006/main"/>
           <a:p xmlns:a="http://schemas.openxmlformats.org/drawingml/2006/main">
             <a:r>
+              <a:rPr lang="en-US" sz="2000">
+                <a:solidFill>
+                  <a:srgbClr val="B4C7E7"/>
+                </a:solidFill>
+              </a:rPr>
               <a:t>Embedded video with officecli</a:t>
             </a:r>
+            <a:endParaRPr lang="en-US"/>
           </a:p>
         </p:txBody>
       </p:sp>
@@ -507,7 +576,7 @@
       <p:grpSpPr/>
       <p:sp>
         <p:nvSpPr>
-          <p:cNvPr id="1" name="Title"/>
+          <p:cNvPr id="2" name="Title"/>
           <p:cNvSpPr/>
           <p:nvPr>
             <p:ph type="title"/>
@@ -524,7 +593,7 @@
           <a:lstStyle xmlns:a="http://schemas.openxmlformats.org/drawingml/2006/main"/>
           <a:p xmlns:a="http://schemas.openxmlformats.org/drawingml/2006/main">
             <a:r>
-              <a:rPr lang="zh-CN">
+              <a:rPr lang="en-US">
                 <a:solidFill>
                   <a:srgbClr val="FFFFFF"/>
                 </a:solidFill>
@@ -536,23 +605,23 @@
       </p:sp>
       <p:pic>
         <p:nvPicPr>
-          <p:cNvPr id="5" name="video">
+          <p:cNvPr id="100000" name="video">
             <a:hlinkClick xmlns:r="http://schemas.openxmlformats.org/officeDocument/2006/relationships" xmlns:a="http://schemas.openxmlformats.org/drawingml/2006/main" r:id="" action="ppaction://media"/>
           </p:cNvPr>
           <p:cNvPicPr>
             <a:picLocks xmlns:a="http://schemas.openxmlformats.org/drawingml/2006/main" noChangeAspect="1"/>
           </p:cNvPicPr>
           <p:nvPr>
-            <a:videoFile xmlns:r="http://schemas.openxmlformats.org/officeDocument/2006/relationships" xmlns:a="http://schemas.openxmlformats.org/drawingml/2006/main" r:link="R87c2ee54800b4289"/>
+            <a:videoFile xmlns:r="http://schemas.openxmlformats.org/officeDocument/2006/relationships" xmlns:a="http://schemas.openxmlformats.org/drawingml/2006/main" r:link="R8f5c5e2a0cdc49bd"/>
             <p:extLst>
               <p:ext uri="{DAA4B4D4-6D71-4841-9C94-3DE7FCFB9230}">
-                <p14:media xmlns:p14="http://schemas.microsoft.com/office/powerpoint/2010/main" xmlns:r="http://schemas.openxmlformats.org/officeDocument/2006/relationships" r:embed="Rf49c128ec73d4514"/>
+                <p14:media xmlns:p14="http://schemas.microsoft.com/office/powerpoint/2010/main" xmlns:r="http://schemas.openxmlformats.org/officeDocument/2006/relationships" r:embed="R3dab9d672e854ddd"/>
               </p:ext>
             </p:extLst>
           </p:nvPr>
         </p:nvPicPr>
         <p:blipFill>
-          <a:blip xmlns:r="http://schemas.openxmlformats.org/officeDocument/2006/relationships" xmlns:a="http://schemas.openxmlformats.org/drawingml/2006/main" r:embed="R321c4952235e4901"/>
+          <a:blip xmlns:r="http://schemas.openxmlformats.org/officeDocument/2006/relationships" xmlns:a="http://schemas.openxmlformats.org/drawingml/2006/main" r:embed="R7f846a300aea48a3"/>
           <a:stretch xmlns:a="http://schemas.openxmlformats.org/drawingml/2006/main">
             <a:fillRect/>
           </a:stretch>
@@ -599,7 +668,7 @@
                                       <p:cBhvr>
                                         <p:cTn id="4" dur="1" fill="hold"/>
                                         <p:tgtEl>
-                                          <p:spTgt spid="5"/>
+                                          <p:spTgt spid="100000"/>
                                         </p:tgtEl>
                                       </p:cBhvr>
                                     </p:cmd>
@@ -637,7 +706,7 @@
                   </p:stCondLst>
                 </p:cTn>
                 <p:tgtEl>
-                  <p:spTgt spid="5"/>
+                  <p:spTgt spid="100000"/>
                 </p:tgtEl>
               </p:cMediaNode>
             </p:video>
@@ -645,7 +714,6 @@
         </p:cTn>
       </p:par>
     </p:tnLst>
-    <p:bldLst/>
   </p:timing>
 </p:sld>
 </file>
@@ -669,7 +737,7 @@
       <p:grpSpPr/>
       <p:sp>
         <p:nvSpPr>
-          <p:cNvPr id="1" name="Title"/>
+          <p:cNvPr id="2" name="Title"/>
           <p:cNvSpPr/>
           <p:nvPr>
             <p:ph type="title"/>
@@ -686,7 +754,7 @@
           <a:lstStyle xmlns:a="http://schemas.openxmlformats.org/drawingml/2006/main"/>
           <a:p xmlns:a="http://schemas.openxmlformats.org/drawingml/2006/main">
             <a:r>
-              <a:rPr lang="zh-CN">
+              <a:rPr lang="en-US">
                 <a:solidFill>
                   <a:srgbClr val="FFFFFF"/>
                 </a:solidFill>
@@ -698,11 +766,9 @@
       </p:sp>
       <p:sp>
         <p:nvSpPr>
-          <p:cNvPr id="3" name="TextBox 2"/>
-          <p:cNvSpPr/>
-          <p:nvPr>
-            <p:ph/>
-          </p:nvPr>
+          <p:cNvPr id="100001" name="TextBox 2"/>
+          <p:cNvSpPr txBox="1"/>
+          <p:nvPr/>
         </p:nvSpPr>
         <p:spPr>
           <a:xfrm xmlns:a="http://schemas.openxmlformats.org/drawingml/2006/main">
@@ -726,7 +792,7 @@
           <a:lstStyle xmlns:a="http://schemas.openxmlformats.org/drawingml/2006/main"/>
           <a:p xmlns:a="http://schemas.openxmlformats.org/drawingml/2006/main">
             <a:r>
-              <a:rPr lang="zh-CN" sz="1600">
+              <a:rPr lang="en-US" sz="1600">
                 <a:solidFill>
                   <a:srgbClr val="B4C7E7"/>
                 </a:solidFill>
@@ -738,7 +804,7 @@
           </a:p>
           <a:p xmlns:a="http://schemas.openxmlformats.org/drawingml/2006/main">
             <a:r>
-              <a:rPr lang="zh-CN" sz="1600">
+              <a:rPr lang="en-US" sz="1600">
                 <a:solidFill>
                   <a:srgbClr val="B4C7E7"/>
                 </a:solidFill>
@@ -750,7 +816,7 @@
           </a:p>
           <a:p xmlns:a="http://schemas.openxmlformats.org/drawingml/2006/main">
             <a:r>
-              <a:rPr lang="zh-CN" sz="1600">
+              <a:rPr lang="en-US" sz="1600">
                 <a:solidFill>
                   <a:srgbClr val="B4C7E7"/>
                 </a:solidFill>
@@ -762,7 +828,7 @@
           </a:p>
           <a:p xmlns:a="http://schemas.openxmlformats.org/drawingml/2006/main">
             <a:r>
-              <a:rPr lang="zh-CN" sz="1600">
+              <a:rPr lang="en-US" sz="1600">
                 <a:solidFill>
                   <a:srgbClr val="B4C7E7"/>
                 </a:solidFill>
@@ -776,7 +842,7 @@
       </p:sp>
       <p:graphicFrame>
         <p:nvGraphicFramePr>
-          <p:cNvPr id="6" name="Frame Colors"/>
+          <p:cNvPr id="100002" name="Frame Colors"/>
           <p:cNvGraphicFramePr/>
           <p:nvPr/>
         </p:nvGraphicFramePr>
@@ -786,12 +852,215 @@
         </p:xfrm>
         <a:graphic xmlns:a="http://schemas.openxmlformats.org/drawingml/2006/main">
           <a:graphicData uri="http://schemas.openxmlformats.org/drawingml/2006/chart">
-            <c:chart xmlns:r="http://schemas.openxmlformats.org/officeDocument/2006/relationships" xmlns:c="http://schemas.openxmlformats.org/drawingml/2006/chart" r:id="Rb362b4a289024204"/>
+            <c:chart xmlns:r="http://schemas.openxmlformats.org/officeDocument/2006/relationships" xmlns:c="http://schemas.openxmlformats.org/drawingml/2006/chart" r:id="Rb766ccd613684801"/>
           </a:graphicData>
         </a:graphic>
       </p:graphicFrame>
     </p:spTree>
   </p:cSld>
+</p:sld>
+</file>
+
+<file path=ppt/slides/slide4.xml><?xml version="1.0" encoding="utf-8"?>
+<p:sld xmlns:p="http://schemas.openxmlformats.org/presentationml/2006/main">
+  <p:cSld>
+    <p:bg>
+      <p:bgPr>
+        <a:solidFill xmlns:a="http://schemas.openxmlformats.org/drawingml/2006/main">
+          <a:srgbClr val="0D1B2A"/>
+        </a:solidFill>
+      </p:bgPr>
+    </p:bg>
+    <p:spTree>
+      <p:nvGrpSpPr>
+        <p:cNvPr id="1" name=""/>
+        <p:cNvGrpSpPr/>
+        <p:nvPr/>
+      </p:nvGrpSpPr>
+      <p:grpSpPr/>
+      <p:sp>
+        <p:nvSpPr>
+          <p:cNvPr id="2" name="Title"/>
+          <p:cNvSpPr/>
+          <p:nvPr>
+            <p:ph type="title"/>
+          </p:nvPr>
+        </p:nvSpPr>
+        <p:spPr>
+          <a:xfrm xmlns:a="http://schemas.openxmlformats.org/drawingml/2006/main">
+            <a:off x="838200" y="365125"/>
+            <a:ext cx="10515600" cy="1325563"/>
+          </a:xfrm>
+        </p:spPr>
+        <p:txBody>
+          <a:bodyPr xmlns:a="http://schemas.openxmlformats.org/drawingml/2006/main"/>
+          <a:lstStyle xmlns:a="http://schemas.openxmlformats.org/drawingml/2006/main"/>
+          <a:p xmlns:a="http://schemas.openxmlformats.org/drawingml/2006/main">
+            <a:r>
+              <a:rPr lang="en-US">
+                <a:solidFill>
+                  <a:srgbClr val="FFFFFF"/>
+                </a:solidFill>
+              </a:rPr>
+              <a:t>loop / trimStart / trimEnd</a:t>
+            </a:r>
+          </a:p>
+        </p:txBody>
+      </p:sp>
+      <p:pic>
+        <p:nvPicPr>
+          <p:cNvPr id="100003" name="video">
+            <a:hlinkClick xmlns:r="http://schemas.openxmlformats.org/officeDocument/2006/relationships" xmlns:a="http://schemas.openxmlformats.org/drawingml/2006/main" r:id="" action="ppaction://media"/>
+          </p:cNvPr>
+          <p:cNvPicPr>
+            <a:picLocks xmlns:a="http://schemas.openxmlformats.org/drawingml/2006/main" noChangeAspect="1"/>
+          </p:cNvPicPr>
+          <p:nvPr>
+            <a:videoFile xmlns:r="http://schemas.openxmlformats.org/officeDocument/2006/relationships" xmlns:a="http://schemas.openxmlformats.org/drawingml/2006/main" r:link="Rf9844b7a2f5241d9"/>
+            <p:extLst>
+              <p:ext uri="{DAA4B4D4-6D71-4841-9C94-3DE7FCFB9230}">
+                <p14:media xmlns:p14="http://schemas.microsoft.com/office/powerpoint/2010/main" xmlns:r="http://schemas.openxmlformats.org/officeDocument/2006/relationships" r:embed="R95a98b55d7684009">
+                  <p14:trim st="0" end="2"/>
+                </p14:media>
+              </p:ext>
+            </p:extLst>
+          </p:nvPr>
+        </p:nvPicPr>
+        <p:blipFill>
+          <a:blip xmlns:r="http://schemas.openxmlformats.org/officeDocument/2006/relationships" xmlns:a="http://schemas.openxmlformats.org/drawingml/2006/main" r:embed="Rc127fe4893a34f63"/>
+          <a:stretch xmlns:a="http://schemas.openxmlformats.org/drawingml/2006/main">
+            <a:fillRect/>
+          </a:stretch>
+        </p:blipFill>
+        <p:spPr>
+          <a:xfrm xmlns:a="http://schemas.openxmlformats.org/drawingml/2006/main">
+            <a:off x="720000" y="1440000"/>
+            <a:ext cx="7920000" cy="4500000"/>
+          </a:xfrm>
+          <a:prstGeom xmlns:a="http://schemas.openxmlformats.org/drawingml/2006/main" prst="rect">
+            <a:avLst/>
+          </a:prstGeom>
+        </p:spPr>
+      </p:pic>
+      <p:sp>
+        <p:nvSpPr>
+          <p:cNvPr id="100004" name="TextBox 2"/>
+          <p:cNvSpPr txBox="1"/>
+          <p:nvPr/>
+        </p:nvSpPr>
+        <p:spPr>
+          <a:xfrm xmlns:a="http://schemas.openxmlformats.org/drawingml/2006/main">
+            <a:off x="360000" y="6120000"/>
+            <a:ext cx="8640000" cy="720000"/>
+          </a:xfrm>
+          <a:prstGeom xmlns:a="http://schemas.openxmlformats.org/drawingml/2006/main" prst="rect">
+            <a:avLst/>
+          </a:prstGeom>
+        </p:spPr>
+        <p:txBody>
+          <a:bodyPr xmlns:a="http://schemas.openxmlformats.org/drawingml/2006/main"/>
+          <a:lstStyle xmlns:a="http://schemas.openxmlformats.org/drawingml/2006/main"/>
+          <a:p xmlns:a="http://schemas.openxmlformats.org/drawingml/2006/main">
+            <a:r>
+              <a:rPr lang="en-US" sz="1400">
+                <a:solidFill>
+                  <a:srgbClr val="B4C7E7"/>
+                </a:solidFill>
+              </a:rPr>
+              <a:t>loop=true  trimStart=0  trimEnd=2</a:t>
+            </a:r>
+          </a:p>
+          <a:p xmlns:a="http://schemas.openxmlformats.org/drawingml/2006/main">
+            <a:r>
+              <a:rPr lang="en-US" sz="1400">
+                <a:solidFill>
+                  <a:srgbClr val="B4C7E7"/>
+                </a:solidFill>
+              </a:rPr>
+              <a:t>Video loops continuously; playback is clipped to the 0–2s range.</a:t>
+            </a:r>
+          </a:p>
+        </p:txBody>
+      </p:sp>
+    </p:spTree>
+  </p:cSld>
+  <p:timing>
+    <p:tnLst>
+      <p:par>
+        <p:cTn id="1" dur="indefinite" restart="never" nodeType="tmRoot">
+          <p:childTnLst>
+            <p:seq concurrent="1" nextAc="seek">
+              <p:cTn id="2" dur="indefinite" nodeType="mainSeq">
+                <p:childTnLst>
+                  <p:par>
+                    <p:cTn id="6" fill="hold">
+                      <p:stCondLst>
+                        <p:cond delay="0"/>
+                      </p:stCondLst>
+                      <p:childTnLst>
+                        <p:par>
+                          <p:cTn id="5" fill="hold">
+                            <p:stCondLst>
+                              <p:cond delay="0"/>
+                            </p:stCondLst>
+                            <p:childTnLst>
+                              <p:par>
+                                <p:cTn id="3" presetID="1" presetClass="mediacall" presetSubtype="0" fill="hold" nodeType="afterEffect">
+                                  <p:stCondLst>
+                                    <p:cond delay="0"/>
+                                  </p:stCondLst>
+                                  <p:childTnLst>
+                                    <p:cmd type="call" cmd="playFrom(0)">
+                                      <p:cBhvr>
+                                        <p:cTn id="4" dur="1" fill="hold"/>
+                                        <p:tgtEl>
+                                          <p:spTgt spid="100003"/>
+                                        </p:tgtEl>
+                                      </p:cBhvr>
+                                    </p:cmd>
+                                  </p:childTnLst>
+                                </p:cTn>
+                              </p:par>
+                            </p:childTnLst>
+                          </p:cTn>
+                        </p:par>
+                      </p:childTnLst>
+                    </p:cTn>
+                  </p:par>
+                </p:childTnLst>
+              </p:cTn>
+              <p:prevCondLst>
+                <p:cond evt="onPrev" delay="0">
+                  <p:tgtEl>
+                    <p:sldTgt/>
+                  </p:tgtEl>
+                </p:cond>
+              </p:prevCondLst>
+              <p:nextCondLst>
+                <p:cond evt="onNext" delay="0">
+                  <p:tgtEl>
+                    <p:sldTgt/>
+                  </p:tgtEl>
+                </p:cond>
+              </p:nextCondLst>
+            </p:seq>
+            <p:video fullScrn="0">
+              <p:cMediaNode vol="60000">
+                <p:cTn id="7" repeatCount="indefinite" fill="hold" display="0">
+                  <p:stCondLst>
+                    <p:cond delay="indefinite"/>
+                  </p:stCondLst>
+                </p:cTn>
+                <p:tgtEl>
+                  <p:spTgt spid="100003"/>
+                </p:tgtEl>
+              </p:cMediaNode>
+            </p:video>
+          </p:childTnLst>
+        </p:cTn>
+      </p:par>
+    </p:tnLst>
+  </p:timing>
 </p:sld>
 </file>
 
